--- a/Lesson35-MarketNegotiation/Lesson35-MarketNegotiation.pptx
+++ b/Lesson35-MarketNegotiation/Lesson35-MarketNegotiation.pptx
@@ -863,7 +863,7 @@
           <a:p>
             <a:r>
               <a:rPr lang="en-US" dirty="0"/>
-              <a:t>Each round follows the same five moves. First, every participant is shown the same market signal. On round one that just says no bids have been submitted yet. Second, BidNegotiator asks each team for a bid, one participant at a time, and gets back a Bid object with a requested amount and a one-sentence justification. Third, MarketCoordinator.CheckFit adds up the asks and compares the total to the budget. Fourth, if the total is at or under budget, the program prints the allocation and stops. Fifth, if not, it builds a new market signal that states the total, how far over budget it is, and every team's ask, and goes round again. MaxRounds is four; if the bids still don't fit on round four, the proportional rationing fallback takes over.</a:t>
+              <a:t>Each round follows the same five moves. First, every participant is shown the same market signal. On round one that just says no bids have been submitted yet. Second, BidNegotiator asks each team for a bid, one participant at a time, and gets back a Bid object with a requested amount and a one-sentence justification. Third, MarketCoordinator.CheckFit adds up the asks and compares the total to the budget. Fourth, if the total is at or under budget and every team has a valid bid, the program prints the allocation and stops. Fifth, if not, it builds a new market signal that states the total, how far over budget it is, and every team's ask, and goes round again. MaxRounds is four; if the bids still don't fit on round four, the proportional rationing fallback takes over.</a:t>
             </a:r>
             <a:endParaRPr lang="en-US" dirty="0"/>
           </a:p>
@@ -1127,7 +1127,7 @@
           <a:p>
             <a:r>
               <a:rPr lang="en-US" dirty="0"/>
-              <a:t>Each round makes one call per participant, and the lesson's own live testing hit plenty of dropped calls from provider-side load. A single dropped call shouldn't force the negotiation to restart. So each SubmitBidAsync call sits in its own try/catch. On failure, the program prints a WARN line and reuses that team's last known bid, exactly like a real bidder who didn't get a chance to revise this time. The lastKnownBids dictionary is seeded with a zero-dollar placeholder for every team before round one, because on round one there is no real previous bid to fall back to, and the seed must be a value that can't be mistaken for a legitimate ask. Finally, bids are collected one at a time with a plain foreach and await, not Task.WhenAll. A sealed-bid round doesn't need true simultaneity to be fair: what matters is that no team sees another's bid this round before submitting, and that holds because every bid is generated from the previous round's signal.</a:t>
+              <a:t>Each round makes one call per participant, and the lesson's own live testing hit plenty of dropped calls from provider-side load. A single dropped call shouldn't force the negotiation to restart. So each SubmitBidAsync call sits in its own try/catch. On failure, the program prints a WARN line and reuses that team's last valid bid, exactly like a real bidder who didn't get a chance to revise this time. A reply that can't be parsed takes the same path: SubmitBidAsync throws rather than inventing a zero-dollar bid, because a zero-dollar placeholder would count toward the total, and one bad parse could make the other bids fit the budget and settle the round with that team allocated nothing. For the same reason, lastValidBids starts empty instead of seeded with zeros. If a team has no valid bid yet, it is left out of that round, and the round can't settle until every team has bid validly. If the round cap arrives with a team still missing, rationing covers the teams that did bid, and the missing team is reported as not allocated. Finally, bids are collected one at a time with a plain foreach and await, not Task.WhenAll. A sealed-bid round doesn't need true simultaneity to be fair: what matters is that no team sees another's bid this round before submitting, and that holds because every bid is generated from the previous round's signal.</a:t>
             </a:r>
             <a:endParaRPr lang="en-US" dirty="0"/>
           </a:p>
@@ -8109,7 +8109,7 @@
                 <a:ea typeface="Calibri" pitchFamily="34" charset="-122"/>
                 <a:cs typeface="Calibri" pitchFamily="34" charset="-120"/>
               </a:rPr>
-              <a:t>The team's last known bid stands in for this round.</a:t>
+              <a:t>Bad call or bad JSON: the last valid bid stands in.</a:t>
             </a:r>
             <a:endParaRPr lang="en-US" sz="1200" dirty="0"/>
           </a:p>
@@ -8226,7 +8226,7 @@
                 <a:ea typeface="Calibri" pitchFamily="34" charset="-122"/>
                 <a:cs typeface="Calibri" pitchFamily="34" charset="-120"/>
               </a:rPr>
-              <a:t>$0 seed</a:t>
+              <a:t>Hold open</a:t>
             </a:r>
             <a:endParaRPr lang="en-US" sz="1300" dirty="0"/>
           </a:p>
@@ -8265,7 +8265,7 @@
                 <a:ea typeface="Calibri" pitchFamily="34" charset="-122"/>
                 <a:cs typeface="Calibri" pitchFamily="34" charset="-120"/>
               </a:rPr>
-              <a:t>lastKnownBids starts at $0, so round 1 has a fallback too.</a:t>
+              <a:t>No valid bid yet? The round can't settle without it.</a:t>
             </a:r>
             <a:endParaRPr lang="en-US" sz="1200" dirty="0"/>
           </a:p>
@@ -8460,7 +8460,7 @@
                 <a:ea typeface="Calibri" pitchFamily="34" charset="-122"/>
                 <a:cs typeface="Calibri" pitchFamily="34" charset="-120"/>
               </a:rPr>
-              <a:t>Every failure path ends in a usable bid, never a crash.</a:t>
+              <a:t>A failed or unparseable bid is never counted as $0.</a:t>
             </a:r>
             <a:endParaRPr lang="en-US" sz="1400" dirty="0"/>
           </a:p>
